--- a/figures-src/sok_timeline.pptx
+++ b/figures-src/sok_timeline.pptx
@@ -259,7 +259,7 @@
           <a:p>
             <a:fld id="{81914AA5-76D3-4F70-9C21-C404C36BCDD0}" type="datetimeFigureOut">
               <a:rPr lang="en-US" smtClean="0"/>
-              <a:t>6/16/2025</a:t>
+              <a:t>1/28/2026</a:t>
             </a:fld>
             <a:endParaRPr lang="en-US"/>
           </a:p>
@@ -457,7 +457,7 @@
           <a:p>
             <a:fld id="{81914AA5-76D3-4F70-9C21-C404C36BCDD0}" type="datetimeFigureOut">
               <a:rPr lang="en-US" smtClean="0"/>
-              <a:t>6/16/2025</a:t>
+              <a:t>1/28/2026</a:t>
             </a:fld>
             <a:endParaRPr lang="en-US"/>
           </a:p>
@@ -665,7 +665,7 @@
           <a:p>
             <a:fld id="{81914AA5-76D3-4F70-9C21-C404C36BCDD0}" type="datetimeFigureOut">
               <a:rPr lang="en-US" smtClean="0"/>
-              <a:t>6/16/2025</a:t>
+              <a:t>1/28/2026</a:t>
             </a:fld>
             <a:endParaRPr lang="en-US"/>
           </a:p>
@@ -863,7 +863,7 @@
           <a:p>
             <a:fld id="{81914AA5-76D3-4F70-9C21-C404C36BCDD0}" type="datetimeFigureOut">
               <a:rPr lang="en-US" smtClean="0"/>
-              <a:t>6/16/2025</a:t>
+              <a:t>1/28/2026</a:t>
             </a:fld>
             <a:endParaRPr lang="en-US"/>
           </a:p>
@@ -1138,7 +1138,7 @@
           <a:p>
             <a:fld id="{81914AA5-76D3-4F70-9C21-C404C36BCDD0}" type="datetimeFigureOut">
               <a:rPr lang="en-US" smtClean="0"/>
-              <a:t>6/16/2025</a:t>
+              <a:t>1/28/2026</a:t>
             </a:fld>
             <a:endParaRPr lang="en-US"/>
           </a:p>
@@ -1403,7 +1403,7 @@
           <a:p>
             <a:fld id="{81914AA5-76D3-4F70-9C21-C404C36BCDD0}" type="datetimeFigureOut">
               <a:rPr lang="en-US" smtClean="0"/>
-              <a:t>6/16/2025</a:t>
+              <a:t>1/28/2026</a:t>
             </a:fld>
             <a:endParaRPr lang="en-US"/>
           </a:p>
@@ -1815,7 +1815,7 @@
           <a:p>
             <a:fld id="{81914AA5-76D3-4F70-9C21-C404C36BCDD0}" type="datetimeFigureOut">
               <a:rPr lang="en-US" smtClean="0"/>
-              <a:t>6/16/2025</a:t>
+              <a:t>1/28/2026</a:t>
             </a:fld>
             <a:endParaRPr lang="en-US"/>
           </a:p>
@@ -1956,7 +1956,7 @@
           <a:p>
             <a:fld id="{81914AA5-76D3-4F70-9C21-C404C36BCDD0}" type="datetimeFigureOut">
               <a:rPr lang="en-US" smtClean="0"/>
-              <a:t>6/16/2025</a:t>
+              <a:t>1/28/2026</a:t>
             </a:fld>
             <a:endParaRPr lang="en-US"/>
           </a:p>
@@ -2069,7 +2069,7 @@
           <a:p>
             <a:fld id="{81914AA5-76D3-4F70-9C21-C404C36BCDD0}" type="datetimeFigureOut">
               <a:rPr lang="en-US" smtClean="0"/>
-              <a:t>6/16/2025</a:t>
+              <a:t>1/28/2026</a:t>
             </a:fld>
             <a:endParaRPr lang="en-US"/>
           </a:p>
@@ -2380,7 +2380,7 @@
           <a:p>
             <a:fld id="{81914AA5-76D3-4F70-9C21-C404C36BCDD0}" type="datetimeFigureOut">
               <a:rPr lang="en-US" smtClean="0"/>
-              <a:t>6/16/2025</a:t>
+              <a:t>1/28/2026</a:t>
             </a:fld>
             <a:endParaRPr lang="en-US"/>
           </a:p>
@@ -2668,7 +2668,7 @@
           <a:p>
             <a:fld id="{81914AA5-76D3-4F70-9C21-C404C36BCDD0}" type="datetimeFigureOut">
               <a:rPr lang="en-US" smtClean="0"/>
-              <a:t>6/16/2025</a:t>
+              <a:t>1/28/2026</a:t>
             </a:fld>
             <a:endParaRPr lang="en-US"/>
           </a:p>
@@ -2909,7 +2909,7 @@
           <a:p>
             <a:fld id="{81914AA5-76D3-4F70-9C21-C404C36BCDD0}" type="datetimeFigureOut">
               <a:rPr lang="en-US" smtClean="0"/>
-              <a:t>6/16/2025</a:t>
+              <a:t>1/28/2026</a:t>
             </a:fld>
             <a:endParaRPr lang="en-US"/>
           </a:p>
@@ -6005,68 +6005,6 @@
           </a:p>
         </p:txBody>
       </p:sp>
-      <p:sp>
-        <p:nvSpPr>
-          <p:cNvPr id="66" name="Rectangle 65">
-            <a:extLst>
-              <a:ext uri="{FF2B5EF4-FFF2-40B4-BE49-F238E27FC236}">
-                <a16:creationId xmlns:a16="http://schemas.microsoft.com/office/drawing/2014/main" id="{425072B3-5FF7-1980-417A-66A7AA09BB62}"/>
-              </a:ext>
-            </a:extLst>
-          </p:cNvPr>
-          <p:cNvSpPr/>
-          <p:nvPr/>
-        </p:nvSpPr>
-        <p:spPr>
-          <a:xfrm>
-            <a:off x="7456052" y="4690443"/>
-            <a:ext cx="1084231" cy="137160"/>
-          </a:xfrm>
-          <a:prstGeom prst="rect">
-            <a:avLst/>
-          </a:prstGeom>
-          <a:solidFill>
-            <a:srgbClr val="FE6100"/>
-          </a:solidFill>
-          <a:ln>
-            <a:solidFill>
-              <a:srgbClr val="FE6100"/>
-            </a:solidFill>
-          </a:ln>
-        </p:spPr>
-        <p:style>
-          <a:lnRef idx="2">
-            <a:schemeClr val="dk1">
-              <a:shade val="15000"/>
-            </a:schemeClr>
-          </a:lnRef>
-          <a:fillRef idx="1">
-            <a:schemeClr val="dk1"/>
-          </a:fillRef>
-          <a:effectRef idx="0">
-            <a:schemeClr val="dk1"/>
-          </a:effectRef>
-          <a:fontRef idx="minor">
-            <a:schemeClr val="lt1"/>
-          </a:fontRef>
-        </p:style>
-        <p:txBody>
-          <a:bodyPr lIns="27432" tIns="45720" rIns="27432" bIns="45720" rtlCol="0" anchor="ctr"/>
-          <a:lstStyle/>
-          <a:p>
-            <a:pPr algn="ctr"/>
-            <a:r>
-              <a:rPr lang="en-US" sz="1200" dirty="0">
-                <a:solidFill>
-                  <a:schemeClr val="bg1"/>
-                </a:solidFill>
-                <a:latin typeface="Latin Modern"/>
-              </a:rPr>
-              <a:t>Privacy Sandbox</a:t>
-            </a:r>
-          </a:p>
-        </p:txBody>
-      </p:sp>
       <p:grpSp>
         <p:nvGrpSpPr>
           <p:cNvPr id="175" name="Group 174">
@@ -6295,7 +6233,7 @@
                 </a:solidFill>
                 <a:latin typeface="Latin Modern"/>
               </a:rPr>
-              <a:t>Same-origin Policy </a:t>
+              <a:t>Same-Origin Policy </a:t>
             </a:r>
           </a:p>
         </p:txBody>
@@ -7947,68 +7885,6 @@
           </a:fontRef>
         </p:style>
       </p:cxnSp>
-      <p:sp>
-        <p:nvSpPr>
-          <p:cNvPr id="156" name="Rectangle 155">
-            <a:extLst>
-              <a:ext uri="{FF2B5EF4-FFF2-40B4-BE49-F238E27FC236}">
-                <a16:creationId xmlns:a16="http://schemas.microsoft.com/office/drawing/2014/main" id="{F138A299-BC27-08E4-5EDF-884000319B9B}"/>
-              </a:ext>
-            </a:extLst>
-          </p:cNvPr>
-          <p:cNvSpPr/>
-          <p:nvPr/>
-        </p:nvSpPr>
-        <p:spPr>
-          <a:xfrm>
-            <a:off x="9863402" y="3774862"/>
-            <a:ext cx="1817631" cy="137160"/>
-          </a:xfrm>
-          <a:prstGeom prst="rect">
-            <a:avLst/>
-          </a:prstGeom>
-          <a:solidFill>
-            <a:srgbClr val="FFB000"/>
-          </a:solidFill>
-          <a:ln>
-            <a:solidFill>
-              <a:srgbClr val="FFB000"/>
-            </a:solidFill>
-          </a:ln>
-        </p:spPr>
-        <p:style>
-          <a:lnRef idx="2">
-            <a:schemeClr val="dk1">
-              <a:shade val="15000"/>
-            </a:schemeClr>
-          </a:lnRef>
-          <a:fillRef idx="1">
-            <a:schemeClr val="dk1"/>
-          </a:fillRef>
-          <a:effectRef idx="0">
-            <a:schemeClr val="dk1"/>
-          </a:effectRef>
-          <a:fontRef idx="minor">
-            <a:schemeClr val="lt1"/>
-          </a:fontRef>
-        </p:style>
-        <p:txBody>
-          <a:bodyPr lIns="27432" tIns="45720" rIns="27432" bIns="45720" rtlCol="0" anchor="ctr"/>
-          <a:lstStyle/>
-          <a:p>
-            <a:pPr algn="ctr"/>
-            <a:r>
-              <a:rPr lang="en-US" sz="1200" dirty="0">
-                <a:solidFill>
-                  <a:schemeClr val="tx1"/>
-                </a:solidFill>
-                <a:latin typeface="Latin Modern"/>
-              </a:rPr>
-              <a:t>Identity providers tracking?</a:t>
-            </a:r>
-          </a:p>
-        </p:txBody>
-      </p:sp>
       <p:cxnSp>
         <p:nvCxnSpPr>
           <p:cNvPr id="158" name="Straight Connector 157">
@@ -8114,68 +7990,6 @@
           </a:p>
         </p:txBody>
       </p:sp>
-      <p:sp>
-        <p:nvSpPr>
-          <p:cNvPr id="163" name="Rectangle 162">
-            <a:extLst>
-              <a:ext uri="{FF2B5EF4-FFF2-40B4-BE49-F238E27FC236}">
-                <a16:creationId xmlns:a16="http://schemas.microsoft.com/office/drawing/2014/main" id="{A75403A2-E082-561F-3269-FECCF4340B74}"/>
-              </a:ext>
-            </a:extLst>
-          </p:cNvPr>
-          <p:cNvSpPr/>
-          <p:nvPr/>
-        </p:nvSpPr>
-        <p:spPr>
-          <a:xfrm>
-            <a:off x="10599440" y="4690443"/>
-            <a:ext cx="1114553" cy="137160"/>
-          </a:xfrm>
-          <a:prstGeom prst="rect">
-            <a:avLst/>
-          </a:prstGeom>
-          <a:solidFill>
-            <a:srgbClr val="FE6100"/>
-          </a:solidFill>
-          <a:ln>
-            <a:solidFill>
-              <a:srgbClr val="FE6100"/>
-            </a:solidFill>
-          </a:ln>
-        </p:spPr>
-        <p:style>
-          <a:lnRef idx="2">
-            <a:schemeClr val="dk1">
-              <a:shade val="15000"/>
-            </a:schemeClr>
-          </a:lnRef>
-          <a:fillRef idx="1">
-            <a:schemeClr val="dk1"/>
-          </a:fillRef>
-          <a:effectRef idx="0">
-            <a:schemeClr val="dk1"/>
-          </a:effectRef>
-          <a:fontRef idx="minor">
-            <a:schemeClr val="lt1"/>
-          </a:fontRef>
-        </p:style>
-        <p:txBody>
-          <a:bodyPr lIns="27432" tIns="45720" rIns="27432" bIns="45720" rtlCol="0" anchor="ctr"/>
-          <a:lstStyle/>
-          <a:p>
-            <a:pPr algn="ctr"/>
-            <a:r>
-              <a:rPr lang="en-US" sz="1200" dirty="0">
-                <a:solidFill>
-                  <a:schemeClr val="bg1"/>
-                </a:solidFill>
-                <a:latin typeface="Latin Modern"/>
-              </a:rPr>
-              <a:t>Cookies opt-out?</a:t>
-            </a:r>
-          </a:p>
-        </p:txBody>
-      </p:sp>
       <p:cxnSp>
         <p:nvCxnSpPr>
           <p:cNvPr id="165" name="Straight Connector 164">
@@ -8192,7 +8006,7 @@
         </p:nvCxnSpPr>
         <p:spPr>
           <a:xfrm>
-            <a:off x="11713993" y="3410283"/>
+            <a:off x="10358836" y="3410283"/>
             <a:ext cx="0" cy="1417320"/>
           </a:xfrm>
           <a:prstGeom prst="line">
@@ -8421,44 +8235,6 @@
       </p:sp>
       <p:sp>
         <p:nvSpPr>
-          <p:cNvPr id="124" name="TextBox 123">
-            <a:extLst>
-              <a:ext uri="{FF2B5EF4-FFF2-40B4-BE49-F238E27FC236}">
-                <a16:creationId xmlns:a16="http://schemas.microsoft.com/office/drawing/2014/main" id="{08E9A249-F197-6A64-C43C-B448A91203C6}"/>
-              </a:ext>
-            </a:extLst>
-          </p:cNvPr>
-          <p:cNvSpPr txBox="1"/>
-          <p:nvPr/>
-        </p:nvSpPr>
-        <p:spPr>
-          <a:xfrm rot="16200000">
-            <a:off x="-763463" y="2419966"/>
-            <a:ext cx="1732376" cy="276999"/>
-          </a:xfrm>
-          <a:prstGeom prst="rect">
-            <a:avLst/>
-          </a:prstGeom>
-          <a:noFill/>
-        </p:spPr>
-        <p:txBody>
-          <a:bodyPr wrap="square" lIns="27432" tIns="45720" rIns="27432" bIns="45720" rtlCol="0">
-            <a:spAutoFit/>
-          </a:bodyPr>
-          <a:lstStyle/>
-          <a:p>
-            <a:pPr algn="ctr"/>
-            <a:r>
-              <a:rPr lang="en-US" sz="1200" dirty="0">
-                <a:latin typeface="Latin Modern"/>
-              </a:rPr>
-              <a:t>Legislation</a:t>
-            </a:r>
-          </a:p>
-        </p:txBody>
-      </p:sp>
-      <p:sp>
-        <p:nvSpPr>
           <p:cNvPr id="5" name="Rectangle: Rounded Corners 4">
             <a:extLst>
               <a:ext uri="{FF2B5EF4-FFF2-40B4-BE49-F238E27FC236}">
@@ -11190,41 +10966,6 @@
       </p:sp>
       <p:sp>
         <p:nvSpPr>
-          <p:cNvPr id="53" name="TextBox 52">
-            <a:extLst>
-              <a:ext uri="{FF2B5EF4-FFF2-40B4-BE49-F238E27FC236}">
-                <a16:creationId xmlns:a16="http://schemas.microsoft.com/office/drawing/2014/main" id="{AC7D9A59-2B96-DE20-6614-1CBB8751D090}"/>
-              </a:ext>
-            </a:extLst>
-          </p:cNvPr>
-          <p:cNvSpPr txBox="1"/>
-          <p:nvPr/>
-        </p:nvSpPr>
-        <p:spPr>
-          <a:xfrm>
-            <a:off x="99152" y="6444867"/>
-            <a:ext cx="4271297" cy="369332"/>
-          </a:xfrm>
-          <a:prstGeom prst="rect">
-            <a:avLst/>
-          </a:prstGeom>
-          <a:noFill/>
-        </p:spPr>
-        <p:txBody>
-          <a:bodyPr wrap="none" rtlCol="0">
-            <a:spAutoFit/>
-          </a:bodyPr>
-          <a:lstStyle/>
-          <a:p>
-            <a:r>
-              <a:rPr lang="en-US" noProof="1"/>
-              <a:t>v3.0 Yohan (Palette is color-blind friendly)</a:t>
-            </a:r>
-          </a:p>
-        </p:txBody>
-      </p:sp>
-      <p:sp>
-        <p:nvSpPr>
           <p:cNvPr id="57" name="TextBox 56">
             <a:extLst>
               <a:ext uri="{FF2B5EF4-FFF2-40B4-BE49-F238E27FC236}">
@@ -11609,6 +11350,168 @@
             <a:endParaRPr lang="en-US" dirty="0">
               <a:latin typeface="Latin Modern"/>
             </a:endParaRPr>
+          </a:p>
+        </p:txBody>
+      </p:sp>
+      <p:sp>
+        <p:nvSpPr>
+          <p:cNvPr id="66" name="Rectangle 65">
+            <a:extLst>
+              <a:ext uri="{FF2B5EF4-FFF2-40B4-BE49-F238E27FC236}">
+                <a16:creationId xmlns:a16="http://schemas.microsoft.com/office/drawing/2014/main" id="{425072B3-5FF7-1980-417A-66A7AA09BB62}"/>
+              </a:ext>
+            </a:extLst>
+          </p:cNvPr>
+          <p:cNvSpPr/>
+          <p:nvPr/>
+        </p:nvSpPr>
+        <p:spPr>
+          <a:xfrm>
+            <a:off x="8540283" y="4690443"/>
+            <a:ext cx="1818553" cy="137160"/>
+          </a:xfrm>
+          <a:prstGeom prst="rect">
+            <a:avLst/>
+          </a:prstGeom>
+          <a:solidFill>
+            <a:srgbClr val="FE6100"/>
+          </a:solidFill>
+          <a:ln>
+            <a:solidFill>
+              <a:srgbClr val="FE6100"/>
+            </a:solidFill>
+          </a:ln>
+        </p:spPr>
+        <p:style>
+          <a:lnRef idx="2">
+            <a:schemeClr val="dk1">
+              <a:shade val="15000"/>
+            </a:schemeClr>
+          </a:lnRef>
+          <a:fillRef idx="1">
+            <a:schemeClr val="dk1"/>
+          </a:fillRef>
+          <a:effectRef idx="0">
+            <a:schemeClr val="dk1"/>
+          </a:effectRef>
+          <a:fontRef idx="minor">
+            <a:schemeClr val="lt1"/>
+          </a:fontRef>
+        </p:style>
+        <p:txBody>
+          <a:bodyPr lIns="27432" tIns="45720" rIns="27432" bIns="45720" rtlCol="0" anchor="ctr"/>
+          <a:lstStyle/>
+          <a:p>
+            <a:pPr algn="ctr"/>
+            <a:r>
+              <a:rPr lang="en-US" sz="1200" dirty="0">
+                <a:solidFill>
+                  <a:schemeClr val="bg1"/>
+                </a:solidFill>
+                <a:latin typeface="Latin Modern"/>
+              </a:rPr>
+              <a:t>Privacy Sandbox Initiative</a:t>
+            </a:r>
+          </a:p>
+        </p:txBody>
+      </p:sp>
+      <p:sp>
+        <p:nvSpPr>
+          <p:cNvPr id="156" name="Rectangle 155">
+            <a:extLst>
+              <a:ext uri="{FF2B5EF4-FFF2-40B4-BE49-F238E27FC236}">
+                <a16:creationId xmlns:a16="http://schemas.microsoft.com/office/drawing/2014/main" id="{F138A299-BC27-08E4-5EDF-884000319B9B}"/>
+              </a:ext>
+            </a:extLst>
+          </p:cNvPr>
+          <p:cNvSpPr/>
+          <p:nvPr/>
+        </p:nvSpPr>
+        <p:spPr>
+          <a:xfrm>
+            <a:off x="9863402" y="3774862"/>
+            <a:ext cx="1817631" cy="137160"/>
+          </a:xfrm>
+          <a:prstGeom prst="rect">
+            <a:avLst/>
+          </a:prstGeom>
+          <a:solidFill>
+            <a:srgbClr val="FFB000"/>
+          </a:solidFill>
+          <a:ln>
+            <a:solidFill>
+              <a:srgbClr val="FFB000"/>
+            </a:solidFill>
+          </a:ln>
+        </p:spPr>
+        <p:style>
+          <a:lnRef idx="2">
+            <a:schemeClr val="dk1">
+              <a:shade val="15000"/>
+            </a:schemeClr>
+          </a:lnRef>
+          <a:fillRef idx="1">
+            <a:schemeClr val="dk1"/>
+          </a:fillRef>
+          <a:effectRef idx="0">
+            <a:schemeClr val="dk1"/>
+          </a:effectRef>
+          <a:fontRef idx="minor">
+            <a:schemeClr val="lt1"/>
+          </a:fontRef>
+        </p:style>
+        <p:txBody>
+          <a:bodyPr lIns="27432" tIns="45720" rIns="27432" bIns="45720" rtlCol="0" anchor="ctr"/>
+          <a:lstStyle/>
+          <a:p>
+            <a:pPr algn="ctr"/>
+            <a:r>
+              <a:rPr lang="en-US" sz="1200" dirty="0">
+                <a:solidFill>
+                  <a:schemeClr val="tx1"/>
+                </a:solidFill>
+                <a:latin typeface="Latin Modern"/>
+              </a:rPr>
+              <a:t>Trusted Server IAB Initiative</a:t>
+            </a:r>
+          </a:p>
+        </p:txBody>
+      </p:sp>
+      <p:sp>
+        <p:nvSpPr>
+          <p:cNvPr id="124" name="TextBox 123">
+            <a:extLst>
+              <a:ext uri="{FF2B5EF4-FFF2-40B4-BE49-F238E27FC236}">
+                <a16:creationId xmlns:a16="http://schemas.microsoft.com/office/drawing/2014/main" id="{08E9A249-F197-6A64-C43C-B448A91203C6}"/>
+              </a:ext>
+            </a:extLst>
+          </p:cNvPr>
+          <p:cNvSpPr txBox="1"/>
+          <p:nvPr/>
+        </p:nvSpPr>
+        <p:spPr>
+          <a:xfrm rot="16200000">
+            <a:off x="-763463" y="2419966"/>
+            <a:ext cx="1732376" cy="276999"/>
+          </a:xfrm>
+          <a:prstGeom prst="rect">
+            <a:avLst/>
+          </a:prstGeom>
+          <a:noFill/>
+        </p:spPr>
+        <p:txBody>
+          <a:bodyPr wrap="square" lIns="27432" tIns="45720" rIns="27432" bIns="45720" rtlCol="0">
+            <a:spAutoFit/>
+          </a:bodyPr>
+          <a:lstStyle/>
+          <a:p>
+            <a:pPr algn="ctr"/>
+            <a:r>
+              <a:rPr lang="en-US" sz="1200" dirty="0">
+                <a:latin typeface="Latin Modern"/>
+              </a:rPr>
+              <a:t>Legislation</a:t>
+            </a:r>
           </a:p>
         </p:txBody>
       </p:sp>
